--- a/courses/nus1/files/tips/Organisatorisches.pptx
+++ b/courses/nus1/files/tips/Organisatorisches.pptx
@@ -4366,13 +4366,13 @@
           <a:p>
             <a:pPr algn="ctr"/>
             <a:r>
-              <a:rPr lang="de-CH" sz="850" b="1" dirty="0" err="1">
+              <a:rPr lang="de-CH" sz="850" b="1" dirty="0">
                 <a:solidFill>
                   <a:srgbClr val="737373"/>
                 </a:solidFill>
                 <a:latin typeface="Aptos"/>
               </a:rPr>
-              <a:t>Organisatorsich</a:t>
+              <a:t>Organisatorisch</a:t>
             </a:r>
             <a:endParaRPr sz="850" b="1" dirty="0">
               <a:solidFill>
@@ -8030,25 +8030,7 @@
                 </a:solidFill>
                 <a:latin typeface="Aptos"/>
               </a:rPr>
-              <a:t>AMIV: </a:t>
-            </a:r>
-            <a:r>
-              <a:rPr lang="de-CH" sz="2000" dirty="0" err="1">
-                <a:solidFill>
-                  <a:srgbClr val="171717"/>
-                </a:solidFill>
-                <a:latin typeface="Aptos"/>
-              </a:rPr>
-              <a:t>Zusamenfassungen</a:t>
-            </a:r>
-            <a:r>
-              <a:rPr lang="de-CH" sz="2000" dirty="0">
-                <a:solidFill>
-                  <a:srgbClr val="171717"/>
-                </a:solidFill>
-                <a:latin typeface="Aptos"/>
-              </a:rPr>
-              <a:t> und Altklausuren</a:t>
+              <a:t>AMIV: Zusammenfassungen und Altklausuren</a:t>
             </a:r>
           </a:p>
           <a:p>

--- a/courses/nus1/files/tips/Organisatorisches.pptx
+++ b/courses/nus1/files/tips/Organisatorisches.pptx
@@ -1071,7 +1071,7 @@
           <a:p>
             <a:fld id="{5BCAD085-E8A6-8845-BD4E-CB4CCA059FC4}" type="datetimeFigureOut">
               <a:rPr lang="en-US" smtClean="0"/>
-              <a:t>9/10/2026</a:t>
+              <a:t>9/16/2026</a:t>
             </a:fld>
             <a:endParaRPr lang="en-US"/>
           </a:p>
@@ -1239,7 +1239,7 @@
           <a:p>
             <a:fld id="{5BCAD085-E8A6-8845-BD4E-CB4CCA059FC4}" type="datetimeFigureOut">
               <a:rPr lang="en-US" smtClean="0"/>
-              <a:t>9/10/2026</a:t>
+              <a:t>9/16/2026</a:t>
             </a:fld>
             <a:endParaRPr lang="en-US"/>
           </a:p>
@@ -1417,7 +1417,7 @@
           <a:p>
             <a:fld id="{5BCAD085-E8A6-8845-BD4E-CB4CCA059FC4}" type="datetimeFigureOut">
               <a:rPr lang="en-US" smtClean="0"/>
-              <a:t>9/10/2026</a:t>
+              <a:t>9/16/2026</a:t>
             </a:fld>
             <a:endParaRPr lang="en-US"/>
           </a:p>
@@ -1585,7 +1585,7 @@
           <a:p>
             <a:fld id="{5BCAD085-E8A6-8845-BD4E-CB4CCA059FC4}" type="datetimeFigureOut">
               <a:rPr lang="en-US" smtClean="0"/>
-              <a:t>9/10/2026</a:t>
+              <a:t>9/16/2026</a:t>
             </a:fld>
             <a:endParaRPr lang="en-US"/>
           </a:p>
@@ -1830,7 +1830,7 @@
           <a:p>
             <a:fld id="{5BCAD085-E8A6-8845-BD4E-CB4CCA059FC4}" type="datetimeFigureOut">
               <a:rPr lang="en-US" smtClean="0"/>
-              <a:t>9/10/2026</a:t>
+              <a:t>9/16/2026</a:t>
             </a:fld>
             <a:endParaRPr lang="en-US"/>
           </a:p>
@@ -2115,7 +2115,7 @@
           <a:p>
             <a:fld id="{5BCAD085-E8A6-8845-BD4E-CB4CCA059FC4}" type="datetimeFigureOut">
               <a:rPr lang="en-US" smtClean="0"/>
-              <a:t>9/10/2026</a:t>
+              <a:t>9/16/2026</a:t>
             </a:fld>
             <a:endParaRPr lang="en-US"/>
           </a:p>
@@ -2534,7 +2534,7 @@
           <a:p>
             <a:fld id="{5BCAD085-E8A6-8845-BD4E-CB4CCA059FC4}" type="datetimeFigureOut">
               <a:rPr lang="en-US" smtClean="0"/>
-              <a:t>9/10/2026</a:t>
+              <a:t>9/16/2026</a:t>
             </a:fld>
             <a:endParaRPr lang="en-US"/>
           </a:p>
@@ -2651,7 +2651,7 @@
           <a:p>
             <a:fld id="{5BCAD085-E8A6-8845-BD4E-CB4CCA059FC4}" type="datetimeFigureOut">
               <a:rPr lang="en-US" smtClean="0"/>
-              <a:t>9/10/2026</a:t>
+              <a:t>9/16/2026</a:t>
             </a:fld>
             <a:endParaRPr lang="en-US"/>
           </a:p>
@@ -2746,7 +2746,7 @@
           <a:p>
             <a:fld id="{5BCAD085-E8A6-8845-BD4E-CB4CCA059FC4}" type="datetimeFigureOut">
               <a:rPr lang="en-US" smtClean="0"/>
-              <a:t>9/10/2026</a:t>
+              <a:t>9/16/2026</a:t>
             </a:fld>
             <a:endParaRPr lang="en-US"/>
           </a:p>
@@ -3021,7 +3021,7 @@
           <a:p>
             <a:fld id="{5BCAD085-E8A6-8845-BD4E-CB4CCA059FC4}" type="datetimeFigureOut">
               <a:rPr lang="en-US" smtClean="0"/>
-              <a:t>9/10/2026</a:t>
+              <a:t>9/16/2026</a:t>
             </a:fld>
             <a:endParaRPr lang="en-US"/>
           </a:p>
@@ -3273,7 +3273,7 @@
           <a:p>
             <a:fld id="{5BCAD085-E8A6-8845-BD4E-CB4CCA059FC4}" type="datetimeFigureOut">
               <a:rPr lang="en-US" smtClean="0"/>
-              <a:t>9/10/2026</a:t>
+              <a:t>9/16/2026</a:t>
             </a:fld>
             <a:endParaRPr lang="en-US"/>
           </a:p>
@@ -3484,7 +3484,7 @@
           <a:p>
             <a:fld id="{5BCAD085-E8A6-8845-BD4E-CB4CCA059FC4}" type="datetimeFigureOut">
               <a:rPr lang="en-US" smtClean="0"/>
-              <a:t>9/10/2026</a:t>
+              <a:t>9/16/2026</a:t>
             </a:fld>
             <a:endParaRPr lang="en-US"/>
           </a:p>
@@ -4160,41 +4160,6 @@
           </a:p>
         </p:txBody>
       </p:sp>
-      <p:sp>
-        <p:nvSpPr>
-          <p:cNvPr id="9" name="TextBox 8"/>
-          <p:cNvSpPr txBox="1"/>
-          <p:nvPr/>
-        </p:nvSpPr>
-        <p:spPr>
-          <a:xfrm>
-            <a:off x="10881360" y="5989320"/>
-            <a:ext cx="685800" cy="274320"/>
-          </a:xfrm>
-          <a:prstGeom prst="rect">
-            <a:avLst/>
-          </a:prstGeom>
-          <a:noFill/>
-        </p:spPr>
-        <p:txBody>
-          <a:bodyPr wrap="none" lIns="0" tIns="0" rIns="0" bIns="0" anchor="t">
-            <a:spAutoFit/>
-          </a:bodyPr>
-          <a:lstStyle/>
-          <a:p>
-            <a:pPr algn="r"/>
-            <a:r>
-              <a:rPr sz="1000" b="1">
-                <a:solidFill>
-                  <a:srgbClr val="737373"/>
-                </a:solidFill>
-                <a:latin typeface="Aptos"/>
-              </a:rPr>
-              <a:t>NUS1</a:t>
-            </a:r>
-          </a:p>
-        </p:txBody>
-      </p:sp>
       <p:pic>
         <p:nvPicPr>
           <p:cNvPr id="11" name="Grafik 10">
@@ -4217,8 +4182,8 @@
         </p:blipFill>
         <p:spPr>
           <a:xfrm>
-            <a:off x="8430768" y="271310"/>
-            <a:ext cx="3136392" cy="3136392"/>
+            <a:off x="9113435" y="236574"/>
+            <a:ext cx="2689505" cy="2689505"/>
           </a:xfrm>
           <a:prstGeom prst="rect">
             <a:avLst/>
@@ -4239,7 +4204,7 @@
         </p:nvSpPr>
         <p:spPr>
           <a:xfrm>
-            <a:off x="9712026" y="3447138"/>
+            <a:off x="10171249" y="2926079"/>
             <a:ext cx="573875" cy="169277"/>
           </a:xfrm>
           <a:prstGeom prst="rect">
@@ -4261,6 +4226,82 @@
                 <a:latin typeface="Aptos"/>
               </a:rPr>
               <a:t>Webseite</a:t>
+            </a:r>
+            <a:endParaRPr sz="1100" b="0" dirty="0">
+              <a:solidFill>
+                <a:srgbClr val="737373"/>
+              </a:solidFill>
+              <a:latin typeface="Aptos"/>
+            </a:endParaRPr>
+          </a:p>
+        </p:txBody>
+      </p:sp>
+      <p:pic>
+        <p:nvPicPr>
+          <p:cNvPr id="12" name="Grafik 11">
+            <a:extLst>
+              <a:ext uri="{FF2B5EF4-FFF2-40B4-BE49-F238E27FC236}">
+                <a16:creationId xmlns:a16="http://schemas.microsoft.com/office/drawing/2014/main" id="{ABF6474E-4BD2-B092-9694-D1C358832995}"/>
+              </a:ext>
+            </a:extLst>
+          </p:cNvPr>
+          <p:cNvPicPr>
+            <a:picLocks noChangeAspect="1"/>
+          </p:cNvPicPr>
+          <p:nvPr/>
+        </p:nvPicPr>
+        <p:blipFill>
+          <a:blip r:embed="rId4"/>
+          <a:stretch>
+            <a:fillRect/>
+          </a:stretch>
+        </p:blipFill>
+        <p:spPr>
+          <a:xfrm>
+            <a:off x="9113435" y="3246120"/>
+            <a:ext cx="2689505" cy="2689505"/>
+          </a:xfrm>
+          <a:prstGeom prst="rect">
+            <a:avLst/>
+          </a:prstGeom>
+        </p:spPr>
+      </p:pic>
+      <p:sp>
+        <p:nvSpPr>
+          <p:cNvPr id="15" name="TextBox 7">
+            <a:extLst>
+              <a:ext uri="{FF2B5EF4-FFF2-40B4-BE49-F238E27FC236}">
+                <a16:creationId xmlns:a16="http://schemas.microsoft.com/office/drawing/2014/main" id="{313F6584-2A96-A1C7-262C-4C3917D060BF}"/>
+              </a:ext>
+            </a:extLst>
+          </p:cNvPr>
+          <p:cNvSpPr txBox="1"/>
+          <p:nvPr/>
+        </p:nvSpPr>
+        <p:spPr>
+          <a:xfrm>
+            <a:off x="10249795" y="5850986"/>
+            <a:ext cx="416781" cy="169277"/>
+          </a:xfrm>
+          <a:prstGeom prst="rect">
+            <a:avLst/>
+          </a:prstGeom>
+          <a:noFill/>
+        </p:spPr>
+        <p:txBody>
+          <a:bodyPr wrap="none" lIns="0" tIns="0" rIns="0" bIns="0" anchor="t">
+            <a:spAutoFit/>
+          </a:bodyPr>
+          <a:lstStyle/>
+          <a:p>
+            <a:r>
+              <a:rPr lang="de-CH" sz="1100" dirty="0">
+                <a:solidFill>
+                  <a:srgbClr val="737373"/>
+                </a:solidFill>
+                <a:latin typeface="Aptos"/>
+              </a:rPr>
+              <a:t>Fragen</a:t>
             </a:r>
             <a:endParaRPr sz="1100" b="0" dirty="0">
               <a:solidFill>
@@ -4573,7 +4614,7 @@
         <p:spPr>
           <a:xfrm>
             <a:off x="914400" y="1959382"/>
-            <a:ext cx="6837577" cy="307777"/>
+            <a:ext cx="9303829" cy="1846659"/>
           </a:xfrm>
           <a:prstGeom prst="rect">
             <a:avLst/>
@@ -4586,44 +4627,6 @@
           </a:bodyPr>
           <a:lstStyle/>
           <a:p>
-            <a:pPr algn="l"/>
-            <a:r>
-              <a:rPr lang="de-CH" sz="2000" b="0" dirty="0">
-                <a:solidFill>
-                  <a:srgbClr val="171717"/>
-                </a:solidFill>
-                <a:latin typeface="Aptos"/>
-              </a:rPr>
-              <a:t>• Fragen an: </a:t>
-            </a:r>
-            <a:r>
-              <a:rPr lang="de-CH" sz="2000" b="0" dirty="0">
-                <a:solidFill>
-                  <a:srgbClr val="171717"/>
-                </a:solidFill>
-                <a:latin typeface="Aptos"/>
-                <a:hlinkClick r:id="rId3"/>
-              </a:rPr>
-              <a:t>eputzi@ethz.ch</a:t>
-            </a:r>
-            <a:r>
-              <a:rPr lang="de-CH" sz="2000" b="0" dirty="0">
-                <a:solidFill>
-                  <a:srgbClr val="171717"/>
-                </a:solidFill>
-                <a:latin typeface="Aptos"/>
-              </a:rPr>
-              <a:t> oder über Frageform oder </a:t>
-            </a:r>
-            <a:r>
-              <a:rPr lang="de-CH" sz="2000" b="0" dirty="0" err="1">
-                <a:solidFill>
-                  <a:srgbClr val="171717"/>
-                </a:solidFill>
-                <a:latin typeface="Aptos"/>
-              </a:rPr>
-              <a:t>Moodle</a:t>
-            </a:r>
             <a:endParaRPr lang="de-CH" sz="2000" b="0" dirty="0">
               <a:solidFill>
                 <a:srgbClr val="171717"/>
@@ -4631,40 +4634,99 @@
               <a:latin typeface="Aptos"/>
             </a:endParaRPr>
           </a:p>
-        </p:txBody>
-      </p:sp>
-      <p:sp>
-        <p:nvSpPr>
-          <p:cNvPr id="12" name="TextBox 11"/>
-          <p:cNvSpPr txBox="1"/>
-          <p:nvPr/>
-        </p:nvSpPr>
-        <p:spPr>
-          <a:xfrm>
-            <a:off x="914400" y="5138928"/>
-            <a:ext cx="3657600" cy="320040"/>
-          </a:xfrm>
-          <a:prstGeom prst="rect">
-            <a:avLst/>
-          </a:prstGeom>
-          <a:noFill/>
-        </p:spPr>
-        <p:txBody>
-          <a:bodyPr wrap="none" lIns="0" tIns="0" rIns="0" bIns="0" anchor="t">
-            <a:spAutoFit/>
-          </a:bodyPr>
-          <a:lstStyle/>
-          <a:p>
-            <a:pPr algn="l"/>
-            <a:r>
-              <a:rPr sz="1050" b="0">
-                <a:solidFill>
-                  <a:srgbClr val="737373"/>
+          <a:p>
+            <a:pPr marL="342900" indent="-342900">
+              <a:buFont typeface="Arial" panose="020B0604020202020204" pitchFamily="34" charset="0"/>
+              <a:buChar char="•"/>
+            </a:pPr>
+            <a:r>
+              <a:rPr lang="de-CH" sz="2000" b="0" dirty="0">
+                <a:solidFill>
+                  <a:srgbClr val="171717"/>
                 </a:solidFill>
                 <a:latin typeface="Aptos"/>
               </a:rPr>
-              <a:t>→ nur das, was auf die Übung einzahlt</a:t>
-            </a:r>
+              <a:t>Fragen </a:t>
+            </a:r>
+            <a:r>
+              <a:rPr lang="de-CH" sz="2000" dirty="0">
+                <a:solidFill>
+                  <a:srgbClr val="171717"/>
+                </a:solidFill>
+                <a:latin typeface="Aptos"/>
+              </a:rPr>
+              <a:t>über Padlet: https://padlet.com/eputzi/fragen-nus1-s023kc9ers4rnija2ohk</a:t>
+            </a:r>
+            <a:endParaRPr lang="de-CH" sz="2000" b="0" dirty="0">
+              <a:solidFill>
+                <a:srgbClr val="171717"/>
+              </a:solidFill>
+              <a:latin typeface="Aptos"/>
+            </a:endParaRPr>
+          </a:p>
+          <a:p>
+            <a:pPr marL="342900" indent="-342900" algn="l">
+              <a:buFont typeface="Arial" panose="020B0604020202020204" pitchFamily="34" charset="0"/>
+              <a:buChar char="•"/>
+            </a:pPr>
+            <a:r>
+              <a:rPr lang="de-CH" sz="2000" b="0" dirty="0">
+                <a:solidFill>
+                  <a:srgbClr val="171717"/>
+                </a:solidFill>
+                <a:latin typeface="Aptos"/>
+              </a:rPr>
+              <a:t>Individuelle Fragen an: </a:t>
+            </a:r>
+            <a:r>
+              <a:rPr lang="de-CH" sz="2000" b="0" dirty="0">
+                <a:solidFill>
+                  <a:srgbClr val="171717"/>
+                </a:solidFill>
+                <a:latin typeface="Aptos"/>
+                <a:hlinkClick r:id="rId3"/>
+              </a:rPr>
+              <a:t>eputzi@ethz.ch</a:t>
+            </a:r>
+            <a:endParaRPr lang="de-CH" sz="2000" b="0" dirty="0">
+              <a:solidFill>
+                <a:srgbClr val="171717"/>
+              </a:solidFill>
+              <a:latin typeface="Aptos"/>
+            </a:endParaRPr>
+          </a:p>
+          <a:p>
+            <a:pPr marL="342900" indent="-342900" algn="l">
+              <a:buFont typeface="Arial" panose="020B0604020202020204" pitchFamily="34" charset="0"/>
+              <a:buChar char="•"/>
+            </a:pPr>
+            <a:endParaRPr lang="de-CH" sz="2000" dirty="0">
+              <a:solidFill>
+                <a:srgbClr val="171717"/>
+              </a:solidFill>
+              <a:latin typeface="Aptos"/>
+            </a:endParaRPr>
+          </a:p>
+          <a:p>
+            <a:pPr marL="342900" indent="-342900" algn="l">
+              <a:buFont typeface="Arial" panose="020B0604020202020204" pitchFamily="34" charset="0"/>
+              <a:buChar char="•"/>
+            </a:pPr>
+            <a:endParaRPr lang="de-CH" sz="2000" b="0" dirty="0">
+              <a:solidFill>
+                <a:srgbClr val="171717"/>
+              </a:solidFill>
+              <a:latin typeface="Aptos"/>
+            </a:endParaRPr>
+          </a:p>
+          <a:p>
+            <a:pPr algn="l"/>
+            <a:endParaRPr lang="de-CH" sz="2000" b="0" dirty="0">
+              <a:solidFill>
+                <a:srgbClr val="171717"/>
+              </a:solidFill>
+              <a:latin typeface="Aptos"/>
+            </a:endParaRPr>
           </a:p>
         </p:txBody>
       </p:sp>
@@ -6885,15 +6947,33 @@
             <a:pPr lvl="1"/>
             <a:r>
               <a:rPr lang="de-CH" sz="2000" dirty="0"/>
-              <a:t>Online-</a:t>
+              <a:t>Online-Übungsplattform Zugang bei Kauf des Buches (</a:t>
+            </a:r>
+            <a:r>
+              <a:rPr lang="de-CH" sz="2000" dirty="0">
+                <a:hlinkClick r:id="rId4"/>
+              </a:rPr>
+              <a:t>https://iml.pearson.com/LMS/login2.php</a:t>
+            </a:r>
+            <a:r>
+              <a:rPr lang="de-CH" sz="2000" dirty="0"/>
+              <a:t> oder über </a:t>
             </a:r>
             <a:r>
               <a:rPr lang="de-CH" sz="2000" dirty="0" err="1"/>
-              <a:t>Übungsplatform</a:t>
+              <a:t>AppStore</a:t>
             </a:r>
             <a:r>
               <a:rPr lang="de-CH" sz="2000" dirty="0"/>
-              <a:t> Zugang bei Kauf des Buches</a:t>
+              <a:t> (</a:t>
+            </a:r>
+            <a:r>
+              <a:rPr lang="de-CH" sz="2000" dirty="0" err="1"/>
+              <a:t>LearningPlace</a:t>
+            </a:r>
+            <a:r>
+              <a:rPr lang="de-CH" sz="2000" dirty="0"/>
+              <a:t>))</a:t>
             </a:r>
           </a:p>
           <a:p>
@@ -6936,7 +7016,7 @@
             <p:nvPr/>
           </p:nvPicPr>
           <p:blipFill>
-            <a:blip r:embed="rId4"/>
+            <a:blip r:embed="rId5"/>
             <a:stretch>
               <a:fillRect/>
             </a:stretch>
@@ -6989,7 +7069,7 @@
               </a:r>
               <a:r>
                 <a:rPr lang="de-CH" sz="1400" dirty="0">
-                  <a:hlinkClick r:id="rId5"/>
+                  <a:hlinkClick r:id="rId6"/>
                 </a:rPr>
                 <a:t>https://www.youtube.com/watch?v=A76JpF7ktCI</a:t>
               </a:r>
@@ -7009,7 +7089,7 @@
               </a:r>
               <a:r>
                 <a:rPr lang="de-CH" sz="1400" dirty="0">
-                  <a:hlinkClick r:id="rId6"/>
+                  <a:hlinkClick r:id="rId7"/>
                 </a:rPr>
                 <a:t>https://www.youtube.com/watch?v=NlGysPeUliY</a:t>
               </a:r>
@@ -7382,7 +7462,7 @@
         <p:spPr>
           <a:xfrm>
             <a:off x="914400" y="1959382"/>
-            <a:ext cx="3498265" cy="2462213"/>
+            <a:ext cx="7643183" cy="2462213"/>
           </a:xfrm>
           <a:prstGeom prst="rect">
             <a:avLst/>
@@ -7436,23 +7516,8 @@
                 </a:solidFill>
                 <a:latin typeface="Aptos"/>
               </a:rPr>
-              <a:t>Versucht das </a:t>
-            </a:r>
-            <a:r>
-              <a:rPr lang="de-CH" sz="2000" dirty="0" err="1">
-                <a:solidFill>
-                  <a:srgbClr val="171717"/>
-                </a:solidFill>
-                <a:latin typeface="Aptos"/>
-              </a:rPr>
-              <a:t>Studycenter</a:t>
-            </a:r>
-            <a:endParaRPr lang="de-CH" sz="2000" dirty="0">
-              <a:solidFill>
-                <a:srgbClr val="171717"/>
-              </a:solidFill>
-              <a:latin typeface="Aptos"/>
-            </a:endParaRPr>
+              <a:t>Versucht das Study Center</a:t>
+            </a:r>
           </a:p>
           <a:p>
             <a:pPr marL="342900" indent="-342900" algn="l">
@@ -7470,7 +7535,7 @@
             </a:r>
           </a:p>
           <a:p>
-            <a:pPr marL="342900" indent="-342900" algn="l">
+            <a:pPr marL="342900" indent="-342900">
               <a:buFont typeface="Arial" panose="020B0604020202020204" pitchFamily="34" charset="0"/>
               <a:buChar char="•"/>
             </a:pPr>
@@ -7532,16 +7597,7 @@
                 </a:solidFill>
                 <a:latin typeface="Aptos"/>
               </a:rPr>
-              <a:t>-Pearson </a:t>
-            </a:r>
-            <a:r>
-              <a:rPr lang="de-CH" sz="2000" dirty="0" err="1">
-                <a:solidFill>
-                  <a:srgbClr val="171717"/>
-                </a:solidFill>
-                <a:latin typeface="Aptos"/>
-              </a:rPr>
-              <a:t>Lernplatform</a:t>
+              <a:t>-Pearson Lernplattform (https://iml.pearson.com/LMS/login2.php)</a:t>
             </a:r>
             <a:endParaRPr lang="de-CH" sz="2000" b="0" dirty="0">
               <a:solidFill>
@@ -7552,6 +7608,36 @@
           </a:p>
         </p:txBody>
       </p:sp>
+      <p:pic>
+        <p:nvPicPr>
+          <p:cNvPr id="5" name="Grafik 4" descr="Messi bis 2018 bei Barcelona - Vorarlberger Nachrichten | VN.at">
+            <a:extLst>
+              <a:ext uri="{FF2B5EF4-FFF2-40B4-BE49-F238E27FC236}">
+                <a16:creationId xmlns:a16="http://schemas.microsoft.com/office/drawing/2014/main" id="{1F4AAACA-20B9-404C-3BCA-91EEF9AD76DB}"/>
+              </a:ext>
+            </a:extLst>
+          </p:cNvPr>
+          <p:cNvPicPr>
+            <a:picLocks noChangeAspect="1"/>
+          </p:cNvPicPr>
+          <p:nvPr/>
+        </p:nvPicPr>
+        <p:blipFill>
+          <a:blip r:embed="rId3"/>
+          <a:stretch>
+            <a:fillRect/>
+          </a:stretch>
+        </p:blipFill>
+        <p:spPr>
+          <a:xfrm>
+            <a:off x="4852283" y="1189502"/>
+            <a:ext cx="1436221" cy="1804626"/>
+          </a:xfrm>
+          <a:prstGeom prst="rect">
+            <a:avLst/>
+          </a:prstGeom>
+        </p:spPr>
+      </p:pic>
     </p:spTree>
     <p:extLst>
       <p:ext uri="{BB962C8B-B14F-4D97-AF65-F5344CB8AC3E}">
@@ -8000,23 +8086,8 @@
                 </a:solidFill>
                 <a:latin typeface="Aptos"/>
               </a:rPr>
-              <a:t>ETH Zürich: Menüpläne und sonst crazy </a:t>
-            </a:r>
-            <a:r>
-              <a:rPr lang="de-CH" sz="2000" dirty="0" err="1">
-                <a:solidFill>
-                  <a:srgbClr val="171717"/>
-                </a:solidFill>
-                <a:latin typeface="Aptos"/>
-              </a:rPr>
-              <a:t>stuff</a:t>
-            </a:r>
-            <a:endParaRPr lang="de-CH" sz="2000" dirty="0">
-              <a:solidFill>
-                <a:srgbClr val="171717"/>
-              </a:solidFill>
-              <a:latin typeface="Aptos"/>
-            </a:endParaRPr>
+              <a:t>ETH Zürich: Menüpläne</a:t>
+            </a:r>
           </a:p>
           <a:p>
             <a:pPr marL="342900" indent="-342900" algn="l">
